--- a/courses/ai/workshop/03_Facilitator/PPT1_Workshop_Slides.pptx
+++ b/courses/ai/workshop/03_Facilitator/PPT1_Workshop_Slides.pptx
@@ -17938,6 +17938,49 @@
           </a:prstGeom>
         </p:spPr>
       </p:pic>
+      <p:sp>
+        <p:nvSpPr>
+          <p:cNvPr id="13" name="TextBox 12">
+            <a:extLst>
+              <a:ext uri="{FF2B5EF4-FFF2-40B4-BE49-F238E27FC236}">
+                <a16:creationId xmlns:a16="http://schemas.microsoft.com/office/drawing/2014/main" id="{97B988D9-6C22-8F2F-208E-676B9832C6F8}"/>
+              </a:ext>
+            </a:extLst>
+          </p:cNvPr>
+          <p:cNvSpPr txBox="1"/>
+          <p:nvPr/>
+        </p:nvSpPr>
+        <p:spPr>
+          <a:xfrm>
+            <a:off x="310294" y="3774461"/>
+            <a:ext cx="4151536" cy="523220"/>
+          </a:xfrm>
+          <a:prstGeom prst="rect">
+            <a:avLst/>
+          </a:prstGeom>
+          <a:noFill/>
+        </p:spPr>
+        <p:txBody>
+          <a:bodyPr wrap="square">
+            <a:spAutoFit/>
+          </a:bodyPr>
+          <a:lstStyle/>
+          <a:p>
+            <a:r>
+              <a:rPr lang="en-US" sz="2800" dirty="0"/>
+              <a:t>https://</a:t>
+            </a:r>
+            <a:r>
+              <a:rPr lang="en-US" sz="2800" dirty="0" err="1"/>
+              <a:t>shorturl.at</a:t>
+            </a:r>
+            <a:r>
+              <a:rPr lang="en-US" sz="2800" dirty="0"/>
+              <a:t>/9kRDK</a:t>
+            </a:r>
+          </a:p>
+        </p:txBody>
+      </p:sp>
     </p:spTree>
     <p:extLst>
       <p:ext uri="{BB962C8B-B14F-4D97-AF65-F5344CB8AC3E}">

--- a/courses/ai/workshop/03_Facilitator/PPT1_Workshop_Slides.pptx
+++ b/courses/ai/workshop/03_Facilitator/PPT1_Workshop_Slides.pptx
@@ -15009,7 +15009,7 @@
                 <a:ea typeface="Cambria" pitchFamily="34" charset="-122"/>
                 <a:cs typeface="Cambria" pitchFamily="34" charset="-120"/>
               </a:rPr>
-              <a:t>Why AI</a:t>
+              <a:t>Why Agents</a:t>
             </a:r>
             <a:endParaRPr lang="en-US" sz="3400" dirty="0"/>
           </a:p>
@@ -15071,19 +15071,27 @@
           </p:nvPr>
         </p:nvPicPr>
         <p:blipFill>
-          <a:blip r:embed="rId5"/>
+          <a:blip r:embed="rId7"/>
           <a:stretch>
             <a:fillRect/>
           </a:stretch>
         </p:blipFill>
         <p:spPr>
           <a:xfrm>
-            <a:off x="5911408" y="845820"/>
-            <a:ext cx="3555629" cy="4819880"/>
+            <a:off x="7758924" y="1710998"/>
+            <a:ext cx="3123935" cy="4234691"/>
           </a:xfrm>
           <a:prstGeom prst="rect">
             <a:avLst/>
           </a:prstGeom>
+          <a:ln w="92075">
+            <a:solidFill>
+              <a:schemeClr val="tx1">
+                <a:lumMod val="85000"/>
+                <a:lumOff val="15000"/>
+              </a:schemeClr>
+            </a:solidFill>
+          </a:ln>
         </p:spPr>
       </p:pic>
       <p:sp>
@@ -15100,8 +15108,8 @@
         </p:nvSpPr>
         <p:spPr>
           <a:xfrm>
-            <a:off x="640080" y="2571337"/>
-            <a:ext cx="4151536" cy="523220"/>
+            <a:off x="579847" y="1833946"/>
+            <a:ext cx="2504876" cy="954107"/>
           </a:xfrm>
           <a:prstGeom prst="rect">
             <a:avLst/>
@@ -15121,6 +15129,52 @@
           </a:p>
         </p:txBody>
       </p:sp>
+      <p:pic>
+        <p:nvPicPr>
+          <p:cNvPr id="9" name="AQMgvLPnkXhWl34Ko5H_XJXokAetGiD838iuTISdDYAPx3FJM5JU58bL8FCd_epkq8mhotDbb9_9CDLSxnKzyy_1h5M-8qB7iAzkQXI.mp4">
+            <a:hlinkClick r:id="" action="ppaction://media"/>
+            <a:extLst>
+              <a:ext uri="{FF2B5EF4-FFF2-40B4-BE49-F238E27FC236}">
+                <a16:creationId xmlns:a16="http://schemas.microsoft.com/office/drawing/2014/main" id="{8A8F4292-AC50-3AE2-A9A5-7EEDD9B1D723}"/>
+              </a:ext>
+            </a:extLst>
+          </p:cNvPr>
+          <p:cNvPicPr>
+            <a:picLocks noChangeAspect="1"/>
+          </p:cNvPicPr>
+          <p:nvPr>
+            <a:videoFile r:link="rId4"/>
+            <p:extLst>
+              <p:ext uri="{DAA4B4D4-6D71-4841-9C94-3DE7FCFB9230}">
+                <p14:media xmlns:p14="http://schemas.microsoft.com/office/powerpoint/2010/main" r:embed="rId3"/>
+              </p:ext>
+            </p:extLst>
+          </p:nvPr>
+        </p:nvPicPr>
+        <p:blipFill>
+          <a:blip r:embed="rId8"/>
+          <a:stretch>
+            <a:fillRect/>
+          </a:stretch>
+        </p:blipFill>
+        <p:spPr>
+          <a:xfrm>
+            <a:off x="3352377" y="1710998"/>
+            <a:ext cx="3013023" cy="4202865"/>
+          </a:xfrm>
+          <a:prstGeom prst="rect">
+            <a:avLst/>
+          </a:prstGeom>
+          <a:ln w="92075">
+            <a:solidFill>
+              <a:schemeClr val="tx1">
+                <a:lumMod val="85000"/>
+                <a:lumOff val="15000"/>
+              </a:schemeClr>
+            </a:solidFill>
+          </a:ln>
+        </p:spPr>
+      </p:pic>
     </p:spTree>
     <p:extLst>
       <p:ext uri="{BB962C8B-B14F-4D97-AF65-F5344CB8AC3E}">
@@ -15174,6 +15228,41 @@
                       </p:childTnLst>
                     </p:cTn>
                   </p:par>
+                  <p:par>
+                    <p:cTn id="7" fill="hold">
+                      <p:stCondLst>
+                        <p:cond delay="indefinite"/>
+                      </p:stCondLst>
+                      <p:childTnLst>
+                        <p:par>
+                          <p:cTn id="8" fill="hold">
+                            <p:stCondLst>
+                              <p:cond delay="0"/>
+                            </p:stCondLst>
+                            <p:childTnLst>
+                              <p:par>
+                                <p:cTn id="9" presetID="1" presetClass="mediacall" presetSubtype="0" fill="hold" nodeType="clickEffect">
+                                  <p:stCondLst>
+                                    <p:cond delay="0"/>
+                                  </p:stCondLst>
+                                  <p:childTnLst>
+                                    <p:cmd type="call" cmd="playFrom(0.0)">
+                                      <p:cBhvr>
+                                        <p:cTn id="10" dur="82941" fill="hold"/>
+                                        <p:tgtEl>
+                                          <p:spTgt spid="9"/>
+                                        </p:tgtEl>
+                                      </p:cBhvr>
+                                    </p:cmd>
+                                  </p:childTnLst>
+                                </p:cTn>
+                              </p:par>
+                            </p:childTnLst>
+                          </p:cTn>
+                        </p:par>
+                      </p:childTnLst>
+                    </p:cTn>
+                  </p:par>
                 </p:childTnLst>
               </p:cTn>
               <p:prevCondLst>
@@ -15193,7 +15282,7 @@
             </p:seq>
             <p:video>
               <p:cMediaNode vol="80000">
-                <p:cTn id="7" fill="hold" display="0">
+                <p:cTn id="11" fill="hold" display="0">
                   <p:stCondLst>
                     <p:cond delay="indefinite"/>
                   </p:stCondLst>
@@ -15204,7 +15293,7 @@
               </p:cMediaNode>
             </p:video>
             <p:seq concurrent="1" nextAc="seek">
-              <p:cTn id="8" restart="whenNotActive" fill="hold" evtFilter="cancelBubble" nodeType="interactiveSeq">
+              <p:cTn id="12" restart="whenNotActive" fill="hold" evtFilter="cancelBubble" nodeType="interactiveSeq">
                 <p:stCondLst>
                   <p:cond evt="onClick" delay="0">
                     <p:tgtEl>
@@ -15217,26 +15306,26 @@
                 </p:endSync>
                 <p:childTnLst>
                   <p:par>
-                    <p:cTn id="9" fill="hold">
+                    <p:cTn id="13" fill="hold">
                       <p:stCondLst>
                         <p:cond delay="0"/>
                       </p:stCondLst>
                       <p:childTnLst>
                         <p:par>
-                          <p:cTn id="10" fill="hold">
+                          <p:cTn id="14" fill="hold">
                             <p:stCondLst>
                               <p:cond delay="0"/>
                             </p:stCondLst>
                             <p:childTnLst>
                               <p:par>
-                                <p:cTn id="11" presetID="2" presetClass="mediacall" presetSubtype="0" fill="hold" nodeType="clickEffect">
+                                <p:cTn id="15" presetID="2" presetClass="mediacall" presetSubtype="0" fill="hold" nodeType="clickEffect">
                                   <p:stCondLst>
                                     <p:cond delay="0"/>
                                   </p:stCondLst>
                                   <p:childTnLst>
                                     <p:cmd type="call" cmd="togglePause">
                                       <p:cBhvr>
-                                        <p:cTn id="12" dur="1" fill="hold"/>
+                                        <p:cTn id="16" dur="1" fill="hold"/>
                                         <p:tgtEl>
                                           <p:spTgt spid="4"/>
                                         </p:tgtEl>
@@ -15257,6 +15346,76 @@
                 <p:cond evt="onClick" delay="0">
                   <p:tgtEl>
                     <p:spTgt spid="4"/>
+                  </p:tgtEl>
+                </p:cond>
+              </p:nextCondLst>
+            </p:seq>
+            <p:video>
+              <p:cMediaNode vol="80000">
+                <p:cTn id="17" fill="hold" display="0">
+                  <p:stCondLst>
+                    <p:cond delay="indefinite"/>
+                  </p:stCondLst>
+                </p:cTn>
+                <p:tgtEl>
+                  <p:spTgt spid="9"/>
+                </p:tgtEl>
+              </p:cMediaNode>
+            </p:video>
+            <p:seq concurrent="1" nextAc="seek">
+              <p:cTn id="18" restart="whenNotActive" fill="hold" evtFilter="cancelBubble" nodeType="interactiveSeq">
+                <p:stCondLst>
+                  <p:cond evt="onClick" delay="0">
+                    <p:tgtEl>
+                      <p:spTgt spid="9"/>
+                    </p:tgtEl>
+                  </p:cond>
+                </p:stCondLst>
+                <p:endSync evt="end" delay="0">
+                  <p:rtn val="all"/>
+                </p:endSync>
+                <p:childTnLst>
+                  <p:par>
+                    <p:cTn id="19" fill="hold">
+                      <p:stCondLst>
+                        <p:cond delay="0"/>
+                      </p:stCondLst>
+                      <p:childTnLst>
+                        <p:par>
+                          <p:cTn id="20" fill="hold">
+                            <p:stCondLst>
+                              <p:cond delay="0"/>
+                            </p:stCondLst>
+                            <p:childTnLst>
+                              <p:par>
+                                <p:cTn id="21" presetID="2" presetClass="mediacall" presetSubtype="0" fill="hold" nodeType="clickEffect">
+                                  <p:stCondLst>
+                                    <p:cond delay="0"/>
+                                  </p:stCondLst>
+                                  <p:childTnLst>
+                                    <p:cmd type="call" cmd="togglePause">
+                                      <p:cBhvr>
+                                        <p:cTn id="22" dur="1" fill="hold"/>
+                                        <p:tgtEl>
+                                          <p:spTgt spid="9"/>
+                                        </p:tgtEl>
+                                      </p:cBhvr>
+                                    </p:cmd>
+                                  </p:childTnLst>
+                                </p:cTn>
+                              </p:par>
+                            </p:childTnLst>
+                          </p:cTn>
+                        </p:par>
+                      </p:childTnLst>
+                    </p:cTn>
+                  </p:par>
+                </p:childTnLst>
+              </p:cTn>
+              <p:nextCondLst>
+                <p:cond evt="onClick" delay="0">
+                  <p:tgtEl>
+                    <p:spTgt spid="9"/>
                   </p:tgtEl>
                 </p:cond>
               </p:nextCondLst>
